--- a/Apresentação.pptx
+++ b/Apresentação.pptx
@@ -5,24 +5,25 @@
     <p:sldMasterId id="2147483659" r:id="rId1"/>
   </p:sldMasterIdLst>
   <p:notesMasterIdLst>
-    <p:notesMasterId r:id="rId7"/>
+    <p:notesMasterId r:id="rId8"/>
   </p:notesMasterIdLst>
   <p:sldIdLst>
     <p:sldId id="256" r:id="rId2"/>
     <p:sldId id="257" r:id="rId3"/>
-    <p:sldId id="258" r:id="rId4"/>
-    <p:sldId id="259" r:id="rId5"/>
-    <p:sldId id="260" r:id="rId6"/>
+    <p:sldId id="259" r:id="rId4"/>
+    <p:sldId id="260" r:id="rId5"/>
+    <p:sldId id="261" r:id="rId6"/>
+    <p:sldId id="258" r:id="rId7"/>
   </p:sldIdLst>
   <p:sldSz cx="9144000" cy="5143500" type="screen16x9"/>
   <p:notesSz cx="6858000" cy="9144000"/>
   <p:embeddedFontLst>
     <p:embeddedFont>
       <p:font typeface="Roboto" panose="02000000000000000000" pitchFamily="2" charset="0"/>
-      <p:regular r:id="rId8"/>
-      <p:bold r:id="rId9"/>
-      <p:italic r:id="rId10"/>
-      <p:boldItalic r:id="rId11"/>
+      <p:regular r:id="rId9"/>
+      <p:bold r:id="rId10"/>
+      <p:italic r:id="rId11"/>
+      <p:boldItalic r:id="rId12"/>
     </p:embeddedFont>
   </p:embeddedFontLst>
   <p:defaultTextStyle>
@@ -927,110 +928,6 @@
   <p:cSld>
     <p:spTree>
       <p:nvGrpSpPr>
-        <p:cNvPr id="1" name="Shape 75"/>
-        <p:cNvGrpSpPr/>
-        <p:nvPr/>
-      </p:nvGrpSpPr>
-      <p:grpSpPr>
-        <a:xfrm>
-          <a:off x="0" y="0"/>
-          <a:ext cx="0" cy="0"/>
-          <a:chOff x="0" y="0"/>
-          <a:chExt cx="0" cy="0"/>
-        </a:xfrm>
-      </p:grpSpPr>
-      <p:sp>
-        <p:nvSpPr>
-          <p:cNvPr id="76" name="Google Shape;76;g2d93e596e20_0_63:notes"/>
-          <p:cNvSpPr>
-            <a:spLocks noGrp="1" noRot="1" noChangeAspect="1"/>
-          </p:cNvSpPr>
-          <p:nvPr>
-            <p:ph type="sldImg" idx="2"/>
-          </p:nvPr>
-        </p:nvSpPr>
-        <p:spPr>
-          <a:xfrm>
-            <a:off x="381000" y="685800"/>
-            <a:ext cx="6096000" cy="3429000"/>
-          </a:xfrm>
-          <a:custGeom>
-            <a:avLst/>
-            <a:gdLst/>
-            <a:ahLst/>
-            <a:cxnLst/>
-            <a:rect l="l" t="t" r="r" b="b"/>
-            <a:pathLst>
-              <a:path w="120000" h="120000" extrusionOk="0">
-                <a:moveTo>
-                  <a:pt x="0" y="0"/>
-                </a:moveTo>
-                <a:lnTo>
-                  <a:pt x="120000" y="0"/>
-                </a:lnTo>
-                <a:lnTo>
-                  <a:pt x="120000" y="120000"/>
-                </a:lnTo>
-                <a:lnTo>
-                  <a:pt x="0" y="120000"/>
-                </a:lnTo>
-                <a:close/>
-              </a:path>
-            </a:pathLst>
-          </a:custGeom>
-        </p:spPr>
-      </p:sp>
-      <p:sp>
-        <p:nvSpPr>
-          <p:cNvPr id="77" name="Google Shape;77;g2d93e596e20_0_63:notes"/>
-          <p:cNvSpPr txBox="1">
-            <a:spLocks noGrp="1"/>
-          </p:cNvSpPr>
-          <p:nvPr>
-            <p:ph type="body" idx="1"/>
-          </p:nvPr>
-        </p:nvSpPr>
-        <p:spPr>
-          <a:xfrm>
-            <a:off x="685800" y="4343400"/>
-            <a:ext cx="5486400" cy="4114800"/>
-          </a:xfrm>
-          <a:prstGeom prst="rect">
-            <a:avLst/>
-          </a:prstGeom>
-        </p:spPr>
-        <p:txBody>
-          <a:bodyPr spcFirstLastPara="1" wrap="square" lIns="91425" tIns="91425" rIns="91425" bIns="91425" anchor="t" anchorCtr="0">
-            <a:noAutofit/>
-          </a:bodyPr>
-          <a:lstStyle/>
-          <a:p>
-            <a:pPr marL="0" lvl="0" indent="0" algn="l" rtl="0">
-              <a:spcBef>
-                <a:spcPts val="0"/>
-              </a:spcBef>
-              <a:spcAft>
-                <a:spcPts val="0"/>
-              </a:spcAft>
-              <a:buNone/>
-            </a:pPr>
-            <a:endParaRPr/>
-          </a:p>
-        </p:txBody>
-      </p:sp>
-    </p:spTree>
-  </p:cSld>
-  <p:clrMapOvr>
-    <a:masterClrMapping/>
-  </p:clrMapOvr>
-</p:notes>
-</file>
-
-<file path=ppt/notesSlides/notesSlide4.xml><?xml version="1.0" encoding="utf-8"?>
-<p:notes xmlns:a="http://schemas.openxmlformats.org/drawingml/2006/main" xmlns:r="http://schemas.openxmlformats.org/officeDocument/2006/relationships" xmlns:p="http://schemas.openxmlformats.org/presentationml/2006/main" showMasterSp="0" showMasterPhAnim="0">
-  <p:cSld>
-    <p:spTree>
-      <p:nvGrpSpPr>
         <p:cNvPr id="1" name="Shape 80"/>
         <p:cNvGrpSpPr/>
         <p:nvPr/>
@@ -1130,7 +1027,7 @@
 </p:notes>
 </file>
 
-<file path=ppt/notesSlides/notesSlide5.xml><?xml version="1.0" encoding="utf-8"?>
+<file path=ppt/notesSlides/notesSlide4.xml><?xml version="1.0" encoding="utf-8"?>
 <p:notes xmlns:a="http://schemas.openxmlformats.org/drawingml/2006/main" xmlns:r="http://schemas.openxmlformats.org/officeDocument/2006/relationships" xmlns:p="http://schemas.openxmlformats.org/presentationml/2006/main" showMasterSp="0" showMasterPhAnim="0">
   <p:cSld>
     <p:spTree>
@@ -1191,6 +1088,237 @@
       <p:sp>
         <p:nvSpPr>
           <p:cNvPr id="88" name="Google Shape;88;g2d93e596e20_0_68:notes"/>
+          <p:cNvSpPr txBox="1">
+            <a:spLocks noGrp="1"/>
+          </p:cNvSpPr>
+          <p:nvPr>
+            <p:ph type="body" idx="1"/>
+          </p:nvPr>
+        </p:nvSpPr>
+        <p:spPr>
+          <a:xfrm>
+            <a:off x="685800" y="4343400"/>
+            <a:ext cx="5486400" cy="4114800"/>
+          </a:xfrm>
+          <a:prstGeom prst="rect">
+            <a:avLst/>
+          </a:prstGeom>
+        </p:spPr>
+        <p:txBody>
+          <a:bodyPr spcFirstLastPara="1" wrap="square" lIns="91425" tIns="91425" rIns="91425" bIns="91425" anchor="t" anchorCtr="0">
+            <a:noAutofit/>
+          </a:bodyPr>
+          <a:lstStyle/>
+          <a:p>
+            <a:pPr marL="0" lvl="0" indent="0" algn="l" rtl="0">
+              <a:spcBef>
+                <a:spcPts val="0"/>
+              </a:spcBef>
+              <a:spcAft>
+                <a:spcPts val="0"/>
+              </a:spcAft>
+              <a:buNone/>
+            </a:pPr>
+            <a:endParaRPr/>
+          </a:p>
+        </p:txBody>
+      </p:sp>
+    </p:spTree>
+  </p:cSld>
+  <p:clrMapOvr>
+    <a:masterClrMapping/>
+  </p:clrMapOvr>
+</p:notes>
+</file>
+
+<file path=ppt/notesSlides/notesSlide5.xml><?xml version="1.0" encoding="utf-8"?>
+<p:notes xmlns:a="http://schemas.openxmlformats.org/drawingml/2006/main" xmlns:r="http://schemas.openxmlformats.org/officeDocument/2006/relationships" xmlns:p="http://schemas.openxmlformats.org/presentationml/2006/main" showMasterSp="0" showMasterPhAnim="0">
+  <p:cSld>
+    <p:spTree>
+      <p:nvGrpSpPr>
+        <p:cNvPr id="1" name="Shape 75">
+          <a:extLst>
+            <a:ext uri="{FF2B5EF4-FFF2-40B4-BE49-F238E27FC236}">
+              <a16:creationId xmlns:a16="http://schemas.microsoft.com/office/drawing/2014/main" id="{A268C61B-2811-CC97-A614-5E250704BCFB}"/>
+            </a:ext>
+          </a:extLst>
+        </p:cNvPr>
+        <p:cNvGrpSpPr/>
+        <p:nvPr/>
+      </p:nvGrpSpPr>
+      <p:grpSpPr>
+        <a:xfrm>
+          <a:off x="0" y="0"/>
+          <a:ext cx="0" cy="0"/>
+          <a:chOff x="0" y="0"/>
+          <a:chExt cx="0" cy="0"/>
+        </a:xfrm>
+      </p:grpSpPr>
+      <p:sp>
+        <p:nvSpPr>
+          <p:cNvPr id="76" name="Google Shape;76;g2d93e596e20_0_63:notes">
+            <a:extLst>
+              <a:ext uri="{FF2B5EF4-FFF2-40B4-BE49-F238E27FC236}">
+                <a16:creationId xmlns:a16="http://schemas.microsoft.com/office/drawing/2014/main" id="{7E19D064-007D-F7EB-29BE-BF0F3511C294}"/>
+              </a:ext>
+            </a:extLst>
+          </p:cNvPr>
+          <p:cNvSpPr>
+            <a:spLocks noGrp="1" noRot="1" noChangeAspect="1"/>
+          </p:cNvSpPr>
+          <p:nvPr>
+            <p:ph type="sldImg" idx="2"/>
+          </p:nvPr>
+        </p:nvSpPr>
+        <p:spPr>
+          <a:xfrm>
+            <a:off x="381000" y="685800"/>
+            <a:ext cx="6096000" cy="3429000"/>
+          </a:xfrm>
+          <a:custGeom>
+            <a:avLst/>
+            <a:gdLst/>
+            <a:ahLst/>
+            <a:cxnLst/>
+            <a:rect l="l" t="t" r="r" b="b"/>
+            <a:pathLst>
+              <a:path w="120000" h="120000" extrusionOk="0">
+                <a:moveTo>
+                  <a:pt x="0" y="0"/>
+                </a:moveTo>
+                <a:lnTo>
+                  <a:pt x="120000" y="0"/>
+                </a:lnTo>
+                <a:lnTo>
+                  <a:pt x="120000" y="120000"/>
+                </a:lnTo>
+                <a:lnTo>
+                  <a:pt x="0" y="120000"/>
+                </a:lnTo>
+                <a:close/>
+              </a:path>
+            </a:pathLst>
+          </a:custGeom>
+        </p:spPr>
+      </p:sp>
+      <p:sp>
+        <p:nvSpPr>
+          <p:cNvPr id="77" name="Google Shape;77;g2d93e596e20_0_63:notes">
+            <a:extLst>
+              <a:ext uri="{FF2B5EF4-FFF2-40B4-BE49-F238E27FC236}">
+                <a16:creationId xmlns:a16="http://schemas.microsoft.com/office/drawing/2014/main" id="{DC758851-122A-3675-D362-6256B76D13FA}"/>
+              </a:ext>
+            </a:extLst>
+          </p:cNvPr>
+          <p:cNvSpPr txBox="1">
+            <a:spLocks noGrp="1"/>
+          </p:cNvSpPr>
+          <p:nvPr>
+            <p:ph type="body" idx="1"/>
+          </p:nvPr>
+        </p:nvSpPr>
+        <p:spPr>
+          <a:xfrm>
+            <a:off x="685800" y="4343400"/>
+            <a:ext cx="5486400" cy="4114800"/>
+          </a:xfrm>
+          <a:prstGeom prst="rect">
+            <a:avLst/>
+          </a:prstGeom>
+        </p:spPr>
+        <p:txBody>
+          <a:bodyPr spcFirstLastPara="1" wrap="square" lIns="91425" tIns="91425" rIns="91425" bIns="91425" anchor="t" anchorCtr="0">
+            <a:noAutofit/>
+          </a:bodyPr>
+          <a:lstStyle/>
+          <a:p>
+            <a:pPr marL="0" lvl="0" indent="0" algn="l" rtl="0">
+              <a:spcBef>
+                <a:spcPts val="0"/>
+              </a:spcBef>
+              <a:spcAft>
+                <a:spcPts val="0"/>
+              </a:spcAft>
+              <a:buNone/>
+            </a:pPr>
+            <a:endParaRPr/>
+          </a:p>
+        </p:txBody>
+      </p:sp>
+    </p:spTree>
+    <p:extLst>
+      <p:ext uri="{BB962C8B-B14F-4D97-AF65-F5344CB8AC3E}">
+        <p14:creationId xmlns:p14="http://schemas.microsoft.com/office/powerpoint/2010/main" val="1498643767"/>
+      </p:ext>
+    </p:extLst>
+  </p:cSld>
+  <p:clrMapOvr>
+    <a:masterClrMapping/>
+  </p:clrMapOvr>
+</p:notes>
+</file>
+
+<file path=ppt/notesSlides/notesSlide6.xml><?xml version="1.0" encoding="utf-8"?>
+<p:notes xmlns:a="http://schemas.openxmlformats.org/drawingml/2006/main" xmlns:r="http://schemas.openxmlformats.org/officeDocument/2006/relationships" xmlns:p="http://schemas.openxmlformats.org/presentationml/2006/main" showMasterSp="0" showMasterPhAnim="0">
+  <p:cSld>
+    <p:spTree>
+      <p:nvGrpSpPr>
+        <p:cNvPr id="1" name="Shape 75"/>
+        <p:cNvGrpSpPr/>
+        <p:nvPr/>
+      </p:nvGrpSpPr>
+      <p:grpSpPr>
+        <a:xfrm>
+          <a:off x="0" y="0"/>
+          <a:ext cx="0" cy="0"/>
+          <a:chOff x="0" y="0"/>
+          <a:chExt cx="0" cy="0"/>
+        </a:xfrm>
+      </p:grpSpPr>
+      <p:sp>
+        <p:nvSpPr>
+          <p:cNvPr id="76" name="Google Shape;76;g2d93e596e20_0_63:notes"/>
+          <p:cNvSpPr>
+            <a:spLocks noGrp="1" noRot="1" noChangeAspect="1"/>
+          </p:cNvSpPr>
+          <p:nvPr>
+            <p:ph type="sldImg" idx="2"/>
+          </p:nvPr>
+        </p:nvSpPr>
+        <p:spPr>
+          <a:xfrm>
+            <a:off x="381000" y="685800"/>
+            <a:ext cx="6096000" cy="3429000"/>
+          </a:xfrm>
+          <a:custGeom>
+            <a:avLst/>
+            <a:gdLst/>
+            <a:ahLst/>
+            <a:cxnLst/>
+            <a:rect l="l" t="t" r="r" b="b"/>
+            <a:pathLst>
+              <a:path w="120000" h="120000" extrusionOk="0">
+                <a:moveTo>
+                  <a:pt x="0" y="0"/>
+                </a:moveTo>
+                <a:lnTo>
+                  <a:pt x="120000" y="0"/>
+                </a:lnTo>
+                <a:lnTo>
+                  <a:pt x="120000" y="120000"/>
+                </a:lnTo>
+                <a:lnTo>
+                  <a:pt x="0" y="120000"/>
+                </a:lnTo>
+                <a:close/>
+              </a:path>
+            </a:pathLst>
+          </a:custGeom>
+        </p:spPr>
+      </p:sp>
+      <p:sp>
+        <p:nvSpPr>
+          <p:cNvPr id="77" name="Google Shape;77;g2d93e596e20_0_63:notes"/>
           <p:cNvSpPr txBox="1">
             <a:spLocks noGrp="1"/>
           </p:cNvSpPr>
@@ -7572,6 +7700,665 @@
   <p:cSld>
     <p:spTree>
       <p:nvGrpSpPr>
+        <p:cNvPr id="1" name="Shape 83"/>
+        <p:cNvGrpSpPr/>
+        <p:nvPr/>
+      </p:nvGrpSpPr>
+      <p:grpSpPr>
+        <a:xfrm>
+          <a:off x="0" y="0"/>
+          <a:ext cx="0" cy="0"/>
+          <a:chOff x="0" y="0"/>
+          <a:chExt cx="0" cy="0"/>
+        </a:xfrm>
+      </p:grpSpPr>
+      <p:sp>
+        <p:nvSpPr>
+          <p:cNvPr id="84" name="Google Shape;84;p16"/>
+          <p:cNvSpPr txBox="1">
+            <a:spLocks noGrp="1"/>
+          </p:cNvSpPr>
+          <p:nvPr>
+            <p:ph type="title"/>
+          </p:nvPr>
+        </p:nvSpPr>
+        <p:spPr>
+          <a:xfrm>
+            <a:off x="471900" y="738725"/>
+            <a:ext cx="8222100" cy="767700"/>
+          </a:xfrm>
+          <a:prstGeom prst="rect">
+            <a:avLst/>
+          </a:prstGeom>
+        </p:spPr>
+        <p:txBody>
+          <a:bodyPr spcFirstLastPara="1" wrap="square" lIns="91425" tIns="91425" rIns="91425" bIns="91425" anchor="b" anchorCtr="0">
+            <a:normAutofit/>
+          </a:bodyPr>
+          <a:lstStyle/>
+          <a:p>
+            <a:pPr marL="0" lvl="0" indent="0" algn="l" rtl="0">
+              <a:spcBef>
+                <a:spcPts val="0"/>
+              </a:spcBef>
+              <a:spcAft>
+                <a:spcPts val="0"/>
+              </a:spcAft>
+              <a:buNone/>
+            </a:pPr>
+            <a:r>
+              <a:rPr lang="pt-BR"/>
+              <a:t>Motivação</a:t>
+            </a:r>
+            <a:endParaRPr/>
+          </a:p>
+        </p:txBody>
+      </p:sp>
+      <p:sp>
+        <p:nvSpPr>
+          <p:cNvPr id="85" name="Google Shape;85;p16"/>
+          <p:cNvSpPr txBox="1">
+            <a:spLocks noGrp="1"/>
+          </p:cNvSpPr>
+          <p:nvPr>
+            <p:ph type="body" idx="1"/>
+          </p:nvPr>
+        </p:nvSpPr>
+        <p:spPr>
+          <a:xfrm>
+            <a:off x="471900" y="1919075"/>
+            <a:ext cx="8222100" cy="2710200"/>
+          </a:xfrm>
+          <a:prstGeom prst="rect">
+            <a:avLst/>
+          </a:prstGeom>
+        </p:spPr>
+        <p:txBody>
+          <a:bodyPr spcFirstLastPara="1" wrap="square" lIns="91425" tIns="91425" rIns="91425" bIns="91425" anchor="t" anchorCtr="0">
+            <a:normAutofit/>
+          </a:bodyPr>
+          <a:lstStyle/>
+          <a:p>
+            <a:pPr marL="0" lvl="0" indent="0" algn="l" rtl="0">
+              <a:spcBef>
+                <a:spcPts val="0"/>
+              </a:spcBef>
+              <a:spcAft>
+                <a:spcPts val="0"/>
+              </a:spcAft>
+              <a:buNone/>
+            </a:pPr>
+            <a:r>
+              <a:rPr lang="pt-BR" dirty="0"/>
+              <a:t>  Transmitir conhecimento </a:t>
+            </a:r>
+            <a:endParaRPr dirty="0"/>
+          </a:p>
+          <a:p>
+            <a:pPr marL="0" lvl="0" indent="0" algn="l" rtl="0">
+              <a:spcBef>
+                <a:spcPts val="1200"/>
+              </a:spcBef>
+              <a:spcAft>
+                <a:spcPts val="0"/>
+              </a:spcAft>
+              <a:buNone/>
+            </a:pPr>
+            <a:r>
+              <a:rPr lang="pt-BR" dirty="0"/>
+              <a:t>  Mostra uma ferramenta robusta para RPA/Teste</a:t>
+            </a:r>
+          </a:p>
+          <a:p>
+            <a:pPr marL="0" lvl="0" indent="0" algn="l" rtl="0">
+              <a:spcBef>
+                <a:spcPts val="1200"/>
+              </a:spcBef>
+              <a:spcAft>
+                <a:spcPts val="0"/>
+              </a:spcAft>
+              <a:buNone/>
+            </a:pPr>
+            <a:r>
+              <a:rPr lang="pt-BR" dirty="0"/>
+              <a:t>  Mostra uma alternativa aos </a:t>
+            </a:r>
+            <a:r>
+              <a:rPr lang="pt-BR" dirty="0" err="1"/>
+              <a:t>classicos</a:t>
+            </a:r>
+            <a:endParaRPr dirty="0"/>
+          </a:p>
+        </p:txBody>
+      </p:sp>
+    </p:spTree>
+  </p:cSld>
+  <p:clrMapOvr>
+    <a:masterClrMapping/>
+  </p:clrMapOvr>
+</p:sld>
+</file>
+
+<file path=ppt/slides/slide4.xml><?xml version="1.0" encoding="utf-8"?>
+<p:sld xmlns:a="http://schemas.openxmlformats.org/drawingml/2006/main" xmlns:r="http://schemas.openxmlformats.org/officeDocument/2006/relationships" xmlns:p="http://schemas.openxmlformats.org/presentationml/2006/main">
+  <p:cSld>
+    <p:spTree>
+      <p:nvGrpSpPr>
+        <p:cNvPr id="1" name="Shape 89"/>
+        <p:cNvGrpSpPr/>
+        <p:nvPr/>
+      </p:nvGrpSpPr>
+      <p:grpSpPr>
+        <a:xfrm>
+          <a:off x="0" y="0"/>
+          <a:ext cx="0" cy="0"/>
+          <a:chOff x="0" y="0"/>
+          <a:chExt cx="0" cy="0"/>
+        </a:xfrm>
+      </p:grpSpPr>
+      <p:sp>
+        <p:nvSpPr>
+          <p:cNvPr id="91" name="Google Shape;91;p17"/>
+          <p:cNvSpPr txBox="1">
+            <a:spLocks noGrp="1"/>
+          </p:cNvSpPr>
+          <p:nvPr>
+            <p:ph type="body" idx="2"/>
+          </p:nvPr>
+        </p:nvSpPr>
+        <p:spPr>
+          <a:xfrm>
+            <a:off x="4939500" y="724200"/>
+            <a:ext cx="3837000" cy="3695100"/>
+          </a:xfrm>
+          <a:prstGeom prst="rect">
+            <a:avLst/>
+          </a:prstGeom>
+        </p:spPr>
+        <p:txBody>
+          <a:bodyPr spcFirstLastPara="1" wrap="square" lIns="91425" tIns="91425" rIns="91425" bIns="91425" anchor="ctr" anchorCtr="0">
+            <a:normAutofit fontScale="77500" lnSpcReduction="20000"/>
+          </a:bodyPr>
+          <a:lstStyle/>
+          <a:p>
+            <a:pPr marL="114300" indent="0" algn="just">
+              <a:buNone/>
+            </a:pPr>
+            <a:r>
+              <a:rPr lang="en-US" dirty="0">
+                <a:solidFill>
+                  <a:schemeClr val="bg2"/>
+                </a:solidFill>
+                <a:highlight>
+                  <a:schemeClr val="lt1"/>
+                </a:highlight>
+              </a:rPr>
+              <a:t>Robot Framework is an open source automation framework for test automation and robotic process automation (RPA). </a:t>
+            </a:r>
+          </a:p>
+          <a:p>
+            <a:pPr algn="just"/>
+            <a:endParaRPr lang="en-US" dirty="0">
+              <a:solidFill>
+                <a:schemeClr val="bg2"/>
+              </a:solidFill>
+              <a:highlight>
+                <a:schemeClr val="lt1"/>
+              </a:highlight>
+            </a:endParaRPr>
+          </a:p>
+          <a:p>
+            <a:pPr marL="114300" indent="0" algn="just">
+              <a:buNone/>
+            </a:pPr>
+            <a:r>
+              <a:rPr lang="en-US" dirty="0">
+                <a:solidFill>
+                  <a:schemeClr val="bg2"/>
+                </a:solidFill>
+                <a:highlight>
+                  <a:schemeClr val="lt1"/>
+                </a:highlight>
+              </a:rPr>
+              <a:t>It is supported by the Robot Framework Foundation and widely used in the industry.</a:t>
+            </a:r>
+          </a:p>
+          <a:p>
+            <a:pPr algn="just"/>
+            <a:endParaRPr lang="en-US" dirty="0">
+              <a:solidFill>
+                <a:schemeClr val="bg2"/>
+              </a:solidFill>
+              <a:highlight>
+                <a:schemeClr val="lt1"/>
+              </a:highlight>
+            </a:endParaRPr>
+          </a:p>
+          <a:p>
+            <a:pPr marL="114300" indent="0" algn="just">
+              <a:buNone/>
+            </a:pPr>
+            <a:r>
+              <a:rPr lang="en-US" dirty="0">
+                <a:solidFill>
+                  <a:schemeClr val="bg2"/>
+                </a:solidFill>
+                <a:highlight>
+                  <a:schemeClr val="lt1"/>
+                </a:highlight>
+              </a:rPr>
+              <a:t>Its human-friendly and versatile syntax uses keywords and supports extending through libraries in Python, Java, and other languages.</a:t>
+            </a:r>
+          </a:p>
+          <a:p>
+            <a:pPr algn="just"/>
+            <a:endParaRPr lang="en-US" dirty="0">
+              <a:solidFill>
+                <a:schemeClr val="bg2"/>
+              </a:solidFill>
+              <a:highlight>
+                <a:schemeClr val="lt1"/>
+              </a:highlight>
+            </a:endParaRPr>
+          </a:p>
+          <a:p>
+            <a:pPr marL="114300" indent="0" algn="just">
+              <a:buNone/>
+            </a:pPr>
+            <a:r>
+              <a:rPr lang="en-US" dirty="0">
+                <a:solidFill>
+                  <a:schemeClr val="bg2"/>
+                </a:solidFill>
+                <a:highlight>
+                  <a:schemeClr val="lt1"/>
+                </a:highlight>
+              </a:rPr>
+              <a:t>It integrates with other tools for comprehensive automation without licensing fees, bolstered by a rich community with hundreds of 3rd party libraries.</a:t>
+            </a:r>
+          </a:p>
+          <a:p>
+            <a:pPr marL="0" lvl="0" indent="0" algn="l" rtl="0">
+              <a:spcBef>
+                <a:spcPts val="0"/>
+              </a:spcBef>
+              <a:spcAft>
+                <a:spcPts val="1200"/>
+              </a:spcAft>
+              <a:buNone/>
+            </a:pPr>
+            <a:endParaRPr sz="2500" dirty="0">
+              <a:highlight>
+                <a:schemeClr val="lt1"/>
+              </a:highlight>
+            </a:endParaRPr>
+          </a:p>
+        </p:txBody>
+      </p:sp>
+      <p:sp>
+        <p:nvSpPr>
+          <p:cNvPr id="92" name="Google Shape;92;p17"/>
+          <p:cNvSpPr txBox="1"/>
+          <p:nvPr/>
+        </p:nvSpPr>
+        <p:spPr>
+          <a:xfrm>
+            <a:off x="623250" y="3825750"/>
+            <a:ext cx="3329700" cy="411000"/>
+          </a:xfrm>
+          <a:prstGeom prst="rect">
+            <a:avLst/>
+          </a:prstGeom>
+          <a:noFill/>
+          <a:ln>
+            <a:noFill/>
+          </a:ln>
+        </p:spPr>
+        <p:txBody>
+          <a:bodyPr spcFirstLastPara="1" wrap="square" lIns="91425" tIns="91425" rIns="91425" bIns="91425" anchor="t" anchorCtr="0">
+            <a:noAutofit/>
+          </a:bodyPr>
+          <a:lstStyle/>
+          <a:p>
+            <a:pPr lvl="0"/>
+            <a:r>
+              <a:rPr lang="pt-BR" sz="1800" dirty="0" err="1">
+                <a:hlinkClick r:id="rId3"/>
+              </a:rPr>
+              <a:t>Robot</a:t>
+            </a:r>
+            <a:r>
+              <a:rPr lang="pt-BR" sz="1800" dirty="0">
+                <a:hlinkClick r:id="rId3"/>
+              </a:rPr>
+              <a:t> Framework</a:t>
+            </a:r>
+            <a:endParaRPr sz="1800" dirty="0">
+              <a:solidFill>
+                <a:schemeClr val="lt2"/>
+              </a:solidFill>
+              <a:latin typeface="Roboto"/>
+              <a:ea typeface="Roboto"/>
+              <a:cs typeface="Roboto"/>
+              <a:sym typeface="Roboto"/>
+            </a:endParaRPr>
+          </a:p>
+        </p:txBody>
+      </p:sp>
+      <p:sp>
+        <p:nvSpPr>
+          <p:cNvPr id="3" name="Título 2">
+            <a:extLst>
+              <a:ext uri="{FF2B5EF4-FFF2-40B4-BE49-F238E27FC236}">
+                <a16:creationId xmlns:a16="http://schemas.microsoft.com/office/drawing/2014/main" id="{642E9042-CD18-F71A-07FC-1C1F8BCAD532}"/>
+              </a:ext>
+            </a:extLst>
+          </p:cNvPr>
+          <p:cNvSpPr>
+            <a:spLocks noGrp="1"/>
+          </p:cNvSpPr>
+          <p:nvPr>
+            <p:ph type="title"/>
+          </p:nvPr>
+        </p:nvSpPr>
+        <p:spPr/>
+        <p:txBody>
+          <a:bodyPr/>
+          <a:lstStyle/>
+          <a:p>
+            <a:endParaRPr lang="pt-BR"/>
+          </a:p>
+        </p:txBody>
+      </p:sp>
+      <p:pic>
+        <p:nvPicPr>
+          <p:cNvPr id="5" name="Imagem 4">
+            <a:extLst>
+              <a:ext uri="{FF2B5EF4-FFF2-40B4-BE49-F238E27FC236}">
+                <a16:creationId xmlns:a16="http://schemas.microsoft.com/office/drawing/2014/main" id="{842CB776-DF98-CF0C-936B-DF8D634329FC}"/>
+              </a:ext>
+            </a:extLst>
+          </p:cNvPr>
+          <p:cNvPicPr>
+            <a:picLocks noChangeAspect="1"/>
+          </p:cNvPicPr>
+          <p:nvPr/>
+        </p:nvPicPr>
+        <p:blipFill>
+          <a:blip r:embed="rId4"/>
+          <a:stretch>
+            <a:fillRect/>
+          </a:stretch>
+        </p:blipFill>
+        <p:spPr>
+          <a:xfrm>
+            <a:off x="367500" y="540612"/>
+            <a:ext cx="4010585" cy="2867425"/>
+          </a:xfrm>
+          <a:prstGeom prst="rect">
+            <a:avLst/>
+          </a:prstGeom>
+        </p:spPr>
+      </p:pic>
+    </p:spTree>
+  </p:cSld>
+  <p:clrMapOvr>
+    <a:masterClrMapping/>
+  </p:clrMapOvr>
+</p:sld>
+</file>
+
+<file path=ppt/slides/slide5.xml><?xml version="1.0" encoding="utf-8"?>
+<p:sld xmlns:a="http://schemas.openxmlformats.org/drawingml/2006/main" xmlns:r="http://schemas.openxmlformats.org/officeDocument/2006/relationships" xmlns:p="http://schemas.openxmlformats.org/presentationml/2006/main">
+  <p:cSld>
+    <p:spTree>
+      <p:nvGrpSpPr>
+        <p:cNvPr id="1" name="Shape 78">
+          <a:extLst>
+            <a:ext uri="{FF2B5EF4-FFF2-40B4-BE49-F238E27FC236}">
+              <a16:creationId xmlns:a16="http://schemas.microsoft.com/office/drawing/2014/main" id="{1B380FE2-3BAE-4E6F-00A6-F7C8871E120F}"/>
+            </a:ext>
+          </a:extLst>
+        </p:cNvPr>
+        <p:cNvGrpSpPr/>
+        <p:nvPr/>
+      </p:nvGrpSpPr>
+      <p:grpSpPr>
+        <a:xfrm>
+          <a:off x="0" y="0"/>
+          <a:ext cx="0" cy="0"/>
+          <a:chOff x="0" y="0"/>
+          <a:chExt cx="0" cy="0"/>
+        </a:xfrm>
+      </p:grpSpPr>
+      <p:sp>
+        <p:nvSpPr>
+          <p:cNvPr id="8" name="CaixaDeTexto 7">
+            <a:extLst>
+              <a:ext uri="{FF2B5EF4-FFF2-40B4-BE49-F238E27FC236}">
+                <a16:creationId xmlns:a16="http://schemas.microsoft.com/office/drawing/2014/main" id="{B93A9017-9E21-3C2B-D1CA-6F36AAA8DB4B}"/>
+              </a:ext>
+            </a:extLst>
+          </p:cNvPr>
+          <p:cNvSpPr txBox="1"/>
+          <p:nvPr/>
+        </p:nvSpPr>
+        <p:spPr>
+          <a:xfrm>
+            <a:off x="2474500" y="491836"/>
+            <a:ext cx="4194999" cy="307777"/>
+          </a:xfrm>
+          <a:prstGeom prst="rect">
+            <a:avLst/>
+          </a:prstGeom>
+          <a:noFill/>
+        </p:spPr>
+        <p:txBody>
+          <a:bodyPr wrap="square" rtlCol="0">
+            <a:spAutoFit/>
+          </a:bodyPr>
+          <a:lstStyle/>
+          <a:p>
+            <a:pPr algn="ctr"/>
+            <a:r>
+              <a:rPr lang="pt-BR" dirty="0">
+                <a:solidFill>
+                  <a:schemeClr val="bg1"/>
+                </a:solidFill>
+              </a:rPr>
+              <a:t>Perguntas?</a:t>
+            </a:r>
+          </a:p>
+        </p:txBody>
+      </p:sp>
+      <p:pic>
+        <p:nvPicPr>
+          <p:cNvPr id="4" name="Imagem 3">
+            <a:extLst>
+              <a:ext uri="{FF2B5EF4-FFF2-40B4-BE49-F238E27FC236}">
+                <a16:creationId xmlns:a16="http://schemas.microsoft.com/office/drawing/2014/main" id="{612B70C8-D615-B724-A343-A66CD4158E90}"/>
+              </a:ext>
+            </a:extLst>
+          </p:cNvPr>
+          <p:cNvPicPr>
+            <a:picLocks noChangeAspect="1"/>
+          </p:cNvPicPr>
+          <p:nvPr/>
+        </p:nvPicPr>
+        <p:blipFill>
+          <a:blip r:embed="rId3"/>
+          <a:stretch>
+            <a:fillRect/>
+          </a:stretch>
+        </p:blipFill>
+        <p:spPr>
+          <a:xfrm>
+            <a:off x="1021443" y="1452264"/>
+            <a:ext cx="2258786" cy="2238972"/>
+          </a:xfrm>
+          <a:prstGeom prst="rect">
+            <a:avLst/>
+          </a:prstGeom>
+        </p:spPr>
+      </p:pic>
+      <p:sp>
+        <p:nvSpPr>
+          <p:cNvPr id="6" name="CaixaDeTexto 5">
+            <a:extLst>
+              <a:ext uri="{FF2B5EF4-FFF2-40B4-BE49-F238E27FC236}">
+                <a16:creationId xmlns:a16="http://schemas.microsoft.com/office/drawing/2014/main" id="{3876D2B7-DDE6-C953-19E6-A99EC6B17A8C}"/>
+              </a:ext>
+            </a:extLst>
+          </p:cNvPr>
+          <p:cNvSpPr txBox="1"/>
+          <p:nvPr/>
+        </p:nvSpPr>
+        <p:spPr>
+          <a:xfrm>
+            <a:off x="53336" y="3909950"/>
+            <a:ext cx="4194999" cy="307777"/>
+          </a:xfrm>
+          <a:prstGeom prst="rect">
+            <a:avLst/>
+          </a:prstGeom>
+          <a:noFill/>
+        </p:spPr>
+        <p:txBody>
+          <a:bodyPr wrap="square" rtlCol="0">
+            <a:spAutoFit/>
+          </a:bodyPr>
+          <a:lstStyle/>
+          <a:p>
+            <a:pPr algn="ctr"/>
+            <a:r>
+              <a:rPr lang="pt-BR" dirty="0">
+                <a:solidFill>
+                  <a:schemeClr val="bg1"/>
+                </a:solidFill>
+              </a:rPr>
+              <a:t>Github</a:t>
+            </a:r>
+          </a:p>
+        </p:txBody>
+      </p:sp>
+      <p:pic>
+        <p:nvPicPr>
+          <p:cNvPr id="11" name="Imagem 10">
+            <a:extLst>
+              <a:ext uri="{FF2B5EF4-FFF2-40B4-BE49-F238E27FC236}">
+                <a16:creationId xmlns:a16="http://schemas.microsoft.com/office/drawing/2014/main" id="{B9986487-9D5D-0706-F088-A1BCE9B8A47A}"/>
+              </a:ext>
+            </a:extLst>
+          </p:cNvPr>
+          <p:cNvPicPr>
+            <a:picLocks noChangeAspect="1"/>
+          </p:cNvPicPr>
+          <p:nvPr/>
+        </p:nvPicPr>
+        <p:blipFill>
+          <a:blip r:embed="rId4"/>
+          <a:stretch>
+            <a:fillRect/>
+          </a:stretch>
+        </p:blipFill>
+        <p:spPr>
+          <a:xfrm>
+            <a:off x="4027488" y="1424582"/>
+            <a:ext cx="2126342" cy="2233827"/>
+          </a:xfrm>
+          <a:prstGeom prst="rect">
+            <a:avLst/>
+          </a:prstGeom>
+        </p:spPr>
+      </p:pic>
+      <p:sp>
+        <p:nvSpPr>
+          <p:cNvPr id="13" name="CaixaDeTexto 12">
+            <a:extLst>
+              <a:ext uri="{FF2B5EF4-FFF2-40B4-BE49-F238E27FC236}">
+                <a16:creationId xmlns:a16="http://schemas.microsoft.com/office/drawing/2014/main" id="{ED78F5F3-D85D-9E62-C787-1C7C38F41E7D}"/>
+              </a:ext>
+            </a:extLst>
+          </p:cNvPr>
+          <p:cNvSpPr txBox="1"/>
+          <p:nvPr/>
+        </p:nvSpPr>
+        <p:spPr>
+          <a:xfrm>
+            <a:off x="3062513" y="3821376"/>
+            <a:ext cx="4194999" cy="307777"/>
+          </a:xfrm>
+          <a:prstGeom prst="rect">
+            <a:avLst/>
+          </a:prstGeom>
+          <a:noFill/>
+        </p:spPr>
+        <p:txBody>
+          <a:bodyPr wrap="square" rtlCol="0">
+            <a:spAutoFit/>
+          </a:bodyPr>
+          <a:lstStyle/>
+          <a:p>
+            <a:pPr algn="ctr"/>
+            <a:r>
+              <a:rPr lang="pt-BR" dirty="0">
+                <a:solidFill>
+                  <a:schemeClr val="bg1"/>
+                </a:solidFill>
+              </a:rPr>
+              <a:t>Contato</a:t>
+            </a:r>
+          </a:p>
+        </p:txBody>
+      </p:sp>
+      <p:pic>
+        <p:nvPicPr>
+          <p:cNvPr id="17" name="Imagem 16">
+            <a:extLst>
+              <a:ext uri="{FF2B5EF4-FFF2-40B4-BE49-F238E27FC236}">
+                <a16:creationId xmlns:a16="http://schemas.microsoft.com/office/drawing/2014/main" id="{08C5E426-3539-1C06-79A0-1AC077B4F117}"/>
+              </a:ext>
+            </a:extLst>
+          </p:cNvPr>
+          <p:cNvPicPr>
+            <a:picLocks noChangeAspect="1"/>
+          </p:cNvPicPr>
+          <p:nvPr/>
+        </p:nvPicPr>
+        <p:blipFill>
+          <a:blip r:embed="rId5"/>
+          <a:stretch>
+            <a:fillRect/>
+          </a:stretch>
+        </p:blipFill>
+        <p:spPr>
+          <a:xfrm>
+            <a:off x="6901089" y="1350191"/>
+            <a:ext cx="2010022" cy="2382611"/>
+          </a:xfrm>
+          <a:prstGeom prst="rect">
+            <a:avLst/>
+          </a:prstGeom>
+        </p:spPr>
+      </p:pic>
+    </p:spTree>
+    <p:extLst>
+      <p:ext uri="{BB962C8B-B14F-4D97-AF65-F5344CB8AC3E}">
+        <p14:creationId xmlns:p14="http://schemas.microsoft.com/office/powerpoint/2010/main" val="3285059631"/>
+      </p:ext>
+    </p:extLst>
+  </p:cSld>
+  <p:clrMapOvr>
+    <a:masterClrMapping/>
+  </p:clrMapOvr>
+</p:sld>
+</file>
+
+<file path=ppt/slides/slide6.xml><?xml version="1.0" encoding="utf-8"?>
+<p:sld xmlns:a="http://schemas.openxmlformats.org/drawingml/2006/main" xmlns:r="http://schemas.openxmlformats.org/officeDocument/2006/relationships" xmlns:p="http://schemas.openxmlformats.org/presentationml/2006/main">
+  <p:cSld>
+    <p:spTree>
+      <p:nvGrpSpPr>
         <p:cNvPr id="1" name="Shape 78"/>
         <p:cNvGrpSpPr/>
         <p:nvPr/>
@@ -7858,419 +8645,6 @@
           <a:xfrm>
             <a:off x="6708078" y="2783385"/>
             <a:ext cx="1181265" cy="323895"/>
-          </a:xfrm>
-          <a:prstGeom prst="rect">
-            <a:avLst/>
-          </a:prstGeom>
-        </p:spPr>
-      </p:pic>
-    </p:spTree>
-  </p:cSld>
-  <p:clrMapOvr>
-    <a:masterClrMapping/>
-  </p:clrMapOvr>
-</p:sld>
-</file>
-
-<file path=ppt/slides/slide4.xml><?xml version="1.0" encoding="utf-8"?>
-<p:sld xmlns:a="http://schemas.openxmlformats.org/drawingml/2006/main" xmlns:r="http://schemas.openxmlformats.org/officeDocument/2006/relationships" xmlns:p="http://schemas.openxmlformats.org/presentationml/2006/main">
-  <p:cSld>
-    <p:spTree>
-      <p:nvGrpSpPr>
-        <p:cNvPr id="1" name="Shape 83"/>
-        <p:cNvGrpSpPr/>
-        <p:nvPr/>
-      </p:nvGrpSpPr>
-      <p:grpSpPr>
-        <a:xfrm>
-          <a:off x="0" y="0"/>
-          <a:ext cx="0" cy="0"/>
-          <a:chOff x="0" y="0"/>
-          <a:chExt cx="0" cy="0"/>
-        </a:xfrm>
-      </p:grpSpPr>
-      <p:sp>
-        <p:nvSpPr>
-          <p:cNvPr id="84" name="Google Shape;84;p16"/>
-          <p:cNvSpPr txBox="1">
-            <a:spLocks noGrp="1"/>
-          </p:cNvSpPr>
-          <p:nvPr>
-            <p:ph type="title"/>
-          </p:nvPr>
-        </p:nvSpPr>
-        <p:spPr>
-          <a:xfrm>
-            <a:off x="471900" y="738725"/>
-            <a:ext cx="8222100" cy="767700"/>
-          </a:xfrm>
-          <a:prstGeom prst="rect">
-            <a:avLst/>
-          </a:prstGeom>
-        </p:spPr>
-        <p:txBody>
-          <a:bodyPr spcFirstLastPara="1" wrap="square" lIns="91425" tIns="91425" rIns="91425" bIns="91425" anchor="b" anchorCtr="0">
-            <a:normAutofit/>
-          </a:bodyPr>
-          <a:lstStyle/>
-          <a:p>
-            <a:pPr marL="0" lvl="0" indent="0" algn="l" rtl="0">
-              <a:spcBef>
-                <a:spcPts val="0"/>
-              </a:spcBef>
-              <a:spcAft>
-                <a:spcPts val="0"/>
-              </a:spcAft>
-              <a:buNone/>
-            </a:pPr>
-            <a:r>
-              <a:rPr lang="pt-BR"/>
-              <a:t>Motivação</a:t>
-            </a:r>
-            <a:endParaRPr/>
-          </a:p>
-        </p:txBody>
-      </p:sp>
-      <p:sp>
-        <p:nvSpPr>
-          <p:cNvPr id="85" name="Google Shape;85;p16"/>
-          <p:cNvSpPr txBox="1">
-            <a:spLocks noGrp="1"/>
-          </p:cNvSpPr>
-          <p:nvPr>
-            <p:ph type="body" idx="1"/>
-          </p:nvPr>
-        </p:nvSpPr>
-        <p:spPr>
-          <a:xfrm>
-            <a:off x="471900" y="1919075"/>
-            <a:ext cx="8222100" cy="2710200"/>
-          </a:xfrm>
-          <a:prstGeom prst="rect">
-            <a:avLst/>
-          </a:prstGeom>
-        </p:spPr>
-        <p:txBody>
-          <a:bodyPr spcFirstLastPara="1" wrap="square" lIns="91425" tIns="91425" rIns="91425" bIns="91425" anchor="t" anchorCtr="0">
-            <a:normAutofit/>
-          </a:bodyPr>
-          <a:lstStyle/>
-          <a:p>
-            <a:pPr marL="0" lvl="0" indent="0" algn="l" rtl="0">
-              <a:spcBef>
-                <a:spcPts val="0"/>
-              </a:spcBef>
-              <a:spcAft>
-                <a:spcPts val="0"/>
-              </a:spcAft>
-              <a:buNone/>
-            </a:pPr>
-            <a:r>
-              <a:rPr lang="pt-BR" dirty="0"/>
-              <a:t>. Transmitir conhecimento </a:t>
-            </a:r>
-            <a:endParaRPr dirty="0"/>
-          </a:p>
-          <a:p>
-            <a:pPr marL="0" lvl="0" indent="0" algn="l" rtl="0">
-              <a:spcBef>
-                <a:spcPts val="1200"/>
-              </a:spcBef>
-              <a:spcAft>
-                <a:spcPts val="0"/>
-              </a:spcAft>
-              <a:buNone/>
-            </a:pPr>
-            <a:r>
-              <a:rPr lang="pt-BR" dirty="0"/>
-              <a:t>  Mostra uma ferramenta robusta para RPA/Teste</a:t>
-            </a:r>
-          </a:p>
-          <a:p>
-            <a:pPr marL="0" lvl="0" indent="0" algn="l" rtl="0">
-              <a:spcBef>
-                <a:spcPts val="1200"/>
-              </a:spcBef>
-              <a:spcAft>
-                <a:spcPts val="0"/>
-              </a:spcAft>
-              <a:buNone/>
-            </a:pPr>
-            <a:r>
-              <a:rPr lang="pt-BR" dirty="0"/>
-              <a:t>  Mostra uma alternativa aos </a:t>
-            </a:r>
-            <a:r>
-              <a:rPr lang="pt-BR" dirty="0" err="1"/>
-              <a:t>classicos</a:t>
-            </a:r>
-            <a:endParaRPr dirty="0"/>
-          </a:p>
-        </p:txBody>
-      </p:sp>
-    </p:spTree>
-  </p:cSld>
-  <p:clrMapOvr>
-    <a:masterClrMapping/>
-  </p:clrMapOvr>
-</p:sld>
-</file>
-
-<file path=ppt/slides/slide5.xml><?xml version="1.0" encoding="utf-8"?>
-<p:sld xmlns:a="http://schemas.openxmlformats.org/drawingml/2006/main" xmlns:r="http://schemas.openxmlformats.org/officeDocument/2006/relationships" xmlns:p="http://schemas.openxmlformats.org/presentationml/2006/main">
-  <p:cSld>
-    <p:spTree>
-      <p:nvGrpSpPr>
-        <p:cNvPr id="1" name="Shape 89"/>
-        <p:cNvGrpSpPr/>
-        <p:nvPr/>
-      </p:nvGrpSpPr>
-      <p:grpSpPr>
-        <a:xfrm>
-          <a:off x="0" y="0"/>
-          <a:ext cx="0" cy="0"/>
-          <a:chOff x="0" y="0"/>
-          <a:chExt cx="0" cy="0"/>
-        </a:xfrm>
-      </p:grpSpPr>
-      <p:sp>
-        <p:nvSpPr>
-          <p:cNvPr id="91" name="Google Shape;91;p17"/>
-          <p:cNvSpPr txBox="1">
-            <a:spLocks noGrp="1"/>
-          </p:cNvSpPr>
-          <p:nvPr>
-            <p:ph type="body" idx="2"/>
-          </p:nvPr>
-        </p:nvSpPr>
-        <p:spPr>
-          <a:xfrm>
-            <a:off x="4939500" y="724200"/>
-            <a:ext cx="3837000" cy="3695100"/>
-          </a:xfrm>
-          <a:prstGeom prst="rect">
-            <a:avLst/>
-          </a:prstGeom>
-        </p:spPr>
-        <p:txBody>
-          <a:bodyPr spcFirstLastPara="1" wrap="square" lIns="91425" tIns="91425" rIns="91425" bIns="91425" anchor="ctr" anchorCtr="0">
-            <a:normAutofit fontScale="77500" lnSpcReduction="20000"/>
-          </a:bodyPr>
-          <a:lstStyle/>
-          <a:p>
-            <a:pPr marL="114300" indent="0" algn="just">
-              <a:buNone/>
-            </a:pPr>
-            <a:r>
-              <a:rPr lang="en-US" dirty="0">
-                <a:solidFill>
-                  <a:schemeClr val="bg2"/>
-                </a:solidFill>
-                <a:highlight>
-                  <a:schemeClr val="lt1"/>
-                </a:highlight>
-              </a:rPr>
-              <a:t>Robot Framework is an open source automation framework for test automation and robotic process automation (RPA). </a:t>
-            </a:r>
-          </a:p>
-          <a:p>
-            <a:pPr algn="just"/>
-            <a:endParaRPr lang="en-US" dirty="0">
-              <a:solidFill>
-                <a:schemeClr val="bg2"/>
-              </a:solidFill>
-              <a:highlight>
-                <a:schemeClr val="lt1"/>
-              </a:highlight>
-            </a:endParaRPr>
-          </a:p>
-          <a:p>
-            <a:pPr marL="114300" indent="0" algn="just">
-              <a:buNone/>
-            </a:pPr>
-            <a:r>
-              <a:rPr lang="en-US" dirty="0">
-                <a:solidFill>
-                  <a:schemeClr val="bg2"/>
-                </a:solidFill>
-                <a:highlight>
-                  <a:schemeClr val="lt1"/>
-                </a:highlight>
-              </a:rPr>
-              <a:t>It is supported by the Robot Framework Foundation and widely used in the industry.</a:t>
-            </a:r>
-          </a:p>
-          <a:p>
-            <a:pPr algn="just"/>
-            <a:endParaRPr lang="en-US" dirty="0">
-              <a:solidFill>
-                <a:schemeClr val="bg2"/>
-              </a:solidFill>
-              <a:highlight>
-                <a:schemeClr val="lt1"/>
-              </a:highlight>
-            </a:endParaRPr>
-          </a:p>
-          <a:p>
-            <a:pPr marL="114300" indent="0" algn="just">
-              <a:buNone/>
-            </a:pPr>
-            <a:r>
-              <a:rPr lang="en-US" dirty="0">
-                <a:solidFill>
-                  <a:schemeClr val="bg2"/>
-                </a:solidFill>
-                <a:highlight>
-                  <a:schemeClr val="lt1"/>
-                </a:highlight>
-              </a:rPr>
-              <a:t>Its human-friendly and versatile syntax uses keywords and supports extending through libraries in Python, Java, and other languages.</a:t>
-            </a:r>
-          </a:p>
-          <a:p>
-            <a:pPr algn="just"/>
-            <a:endParaRPr lang="en-US" dirty="0">
-              <a:solidFill>
-                <a:schemeClr val="bg2"/>
-              </a:solidFill>
-              <a:highlight>
-                <a:schemeClr val="lt1"/>
-              </a:highlight>
-            </a:endParaRPr>
-          </a:p>
-          <a:p>
-            <a:pPr marL="114300" indent="0" algn="just">
-              <a:buNone/>
-            </a:pPr>
-            <a:r>
-              <a:rPr lang="en-US" dirty="0">
-                <a:solidFill>
-                  <a:schemeClr val="bg2"/>
-                </a:solidFill>
-                <a:highlight>
-                  <a:schemeClr val="lt1"/>
-                </a:highlight>
-              </a:rPr>
-              <a:t>It integrates with other tools for comprehensive automation without licensing fees, bolstered by a rich community with hundreds of 3rd party libraries.</a:t>
-            </a:r>
-          </a:p>
-          <a:p>
-            <a:pPr marL="0" lvl="0" indent="0" algn="l" rtl="0">
-              <a:spcBef>
-                <a:spcPts val="0"/>
-              </a:spcBef>
-              <a:spcAft>
-                <a:spcPts val="1200"/>
-              </a:spcAft>
-              <a:buNone/>
-            </a:pPr>
-            <a:endParaRPr sz="2500" dirty="0">
-              <a:highlight>
-                <a:schemeClr val="lt1"/>
-              </a:highlight>
-            </a:endParaRPr>
-          </a:p>
-        </p:txBody>
-      </p:sp>
-      <p:sp>
-        <p:nvSpPr>
-          <p:cNvPr id="92" name="Google Shape;92;p17"/>
-          <p:cNvSpPr txBox="1"/>
-          <p:nvPr/>
-        </p:nvSpPr>
-        <p:spPr>
-          <a:xfrm>
-            <a:off x="623250" y="3825750"/>
-            <a:ext cx="3329700" cy="411000"/>
-          </a:xfrm>
-          <a:prstGeom prst="rect">
-            <a:avLst/>
-          </a:prstGeom>
-          <a:noFill/>
-          <a:ln>
-            <a:noFill/>
-          </a:ln>
-        </p:spPr>
-        <p:txBody>
-          <a:bodyPr spcFirstLastPara="1" wrap="square" lIns="91425" tIns="91425" rIns="91425" bIns="91425" anchor="t" anchorCtr="0">
-            <a:noAutofit/>
-          </a:bodyPr>
-          <a:lstStyle/>
-          <a:p>
-            <a:pPr lvl="0"/>
-            <a:r>
-              <a:rPr lang="pt-BR" sz="1800" dirty="0" err="1">
-                <a:hlinkClick r:id="rId3"/>
-              </a:rPr>
-              <a:t>Robot</a:t>
-            </a:r>
-            <a:r>
-              <a:rPr lang="pt-BR" sz="1800" dirty="0">
-                <a:hlinkClick r:id="rId3"/>
-              </a:rPr>
-              <a:t> Framework</a:t>
-            </a:r>
-            <a:endParaRPr sz="1800" dirty="0">
-              <a:solidFill>
-                <a:schemeClr val="lt2"/>
-              </a:solidFill>
-              <a:latin typeface="Roboto"/>
-              <a:ea typeface="Roboto"/>
-              <a:cs typeface="Roboto"/>
-              <a:sym typeface="Roboto"/>
-            </a:endParaRPr>
-          </a:p>
-        </p:txBody>
-      </p:sp>
-      <p:sp>
-        <p:nvSpPr>
-          <p:cNvPr id="3" name="Título 2">
-            <a:extLst>
-              <a:ext uri="{FF2B5EF4-FFF2-40B4-BE49-F238E27FC236}">
-                <a16:creationId xmlns:a16="http://schemas.microsoft.com/office/drawing/2014/main" id="{642E9042-CD18-F71A-07FC-1C1F8BCAD532}"/>
-              </a:ext>
-            </a:extLst>
-          </p:cNvPr>
-          <p:cNvSpPr>
-            <a:spLocks noGrp="1"/>
-          </p:cNvSpPr>
-          <p:nvPr>
-            <p:ph type="title"/>
-          </p:nvPr>
-        </p:nvSpPr>
-        <p:spPr/>
-        <p:txBody>
-          <a:bodyPr/>
-          <a:lstStyle/>
-          <a:p>
-            <a:endParaRPr lang="pt-BR"/>
-          </a:p>
-        </p:txBody>
-      </p:sp>
-      <p:pic>
-        <p:nvPicPr>
-          <p:cNvPr id="5" name="Imagem 4">
-            <a:extLst>
-              <a:ext uri="{FF2B5EF4-FFF2-40B4-BE49-F238E27FC236}">
-                <a16:creationId xmlns:a16="http://schemas.microsoft.com/office/drawing/2014/main" id="{842CB776-DF98-CF0C-936B-DF8D634329FC}"/>
-              </a:ext>
-            </a:extLst>
-          </p:cNvPr>
-          <p:cNvPicPr>
-            <a:picLocks noChangeAspect="1"/>
-          </p:cNvPicPr>
-          <p:nvPr/>
-        </p:nvPicPr>
-        <p:blipFill>
-          <a:blip r:embed="rId4"/>
-          <a:stretch>
-            <a:fillRect/>
-          </a:stretch>
-        </p:blipFill>
-        <p:spPr>
-          <a:xfrm>
-            <a:off x="367500" y="540612"/>
-            <a:ext cx="4010585" cy="2867425"/>
           </a:xfrm>
           <a:prstGeom prst="rect">
             <a:avLst/>
